--- a/Slides/Semana 4/semana_4_slides.pptx
+++ b/Slides/Semana 4/semana_4_slides.pptx
@@ -883,7 +883,7 @@
 - "Nosso público-alvo está claro o suficiente para orientar as próximas decisões?"
 - "Essa ideia é viável com o tempo e os recursos que temos neste semestre?"
 Avaliação nesta semana: início do acompanhamento (sem nota) de Planejamento — clareza e coerência da proposta inicial — e Trabalho em Equipe — participação de todos na decisão e na redação, conforme Rubrica de Avaliação. Esta é a primeira entrega formal do projeto, base do acompanhamento longitudinal iniciado na Semana 3.
-Fonte: Plano Semanal Semana 4, Cronograma, CLAUDE.md, COURSE_CONTEXT.md, PEDAGOGICAL_RULES.md, EXTENSION_PROJECT_GUIDE.md.</a:t>
+Fonte: Plano Semanal Semana 4, Cronograma.</a:t>
             </a:r>
             <a:endParaRPr lang="en-US" dirty="0"/>
           </a:p>
